--- a/assets/img/portfolio/Portfolio image.pptx
+++ b/assets/img/portfolio/Portfolio image.pptx
@@ -3342,56 +3342,2008 @@
           <a:chExt cx="0" cy="0"/>
         </a:xfrm>
       </p:grpSpPr>
-      <p:sp>
-        <p:nvSpPr>
-          <p:cNvPr id="2" name="Title 1">
-            <a:extLst>
-              <a:ext uri="{FF2B5EF4-FFF2-40B4-BE49-F238E27FC236}">
-                <a16:creationId xmlns:a16="http://schemas.microsoft.com/office/drawing/2014/main" id="{75E8EA0C-42E0-589E-B91F-CFAC51126F84}"/>
-              </a:ext>
-            </a:extLst>
-          </p:cNvPr>
-          <p:cNvSpPr>
-            <a:spLocks noGrp="1"/>
-          </p:cNvSpPr>
-          <p:nvPr>
-            <p:ph type="ctrTitle"/>
-          </p:nvPr>
-        </p:nvSpPr>
-        <p:spPr/>
-        <p:txBody>
-          <a:bodyPr/>
+      <p:pic>
+        <p:nvPicPr>
+          <p:cNvPr id="5" name="그림 233">
+            <a:extLst>
+              <a:ext uri="{FF2B5EF4-FFF2-40B4-BE49-F238E27FC236}">
+                <a16:creationId xmlns:a16="http://schemas.microsoft.com/office/drawing/2014/main" id="{A35F197E-C961-B7D8-5043-4DCBE52647C6}"/>
+              </a:ext>
+            </a:extLst>
+          </p:cNvPr>
+          <p:cNvPicPr>
+            <a:picLocks noChangeAspect="1"/>
+          </p:cNvPicPr>
+          <p:nvPr/>
+        </p:nvPicPr>
+        <p:blipFill>
+          <a:blip r:embed="rId2"/>
+          <a:stretch>
+            <a:fillRect/>
+          </a:stretch>
+        </p:blipFill>
+        <p:spPr>
+          <a:xfrm>
+            <a:off x="3480906" y="572469"/>
+            <a:ext cx="4150069" cy="2350731"/>
+          </a:xfrm>
+          <a:prstGeom prst="rect">
+            <a:avLst/>
+          </a:prstGeom>
+          <a:effectLst>
+            <a:outerShdw blurRad="63500" sx="102000" sy="102000" algn="ctr" rotWithShape="0">
+              <a:prstClr val="black">
+                <a:alpha val="0"/>
+              </a:prstClr>
+            </a:outerShdw>
+          </a:effectLst>
+        </p:spPr>
+      </p:pic>
+      <p:sp>
+        <p:nvSpPr>
+          <p:cNvPr id="24" name="사각형: 둥근 모서리 228">
+            <a:extLst>
+              <a:ext uri="{FF2B5EF4-FFF2-40B4-BE49-F238E27FC236}">
+                <a16:creationId xmlns:a16="http://schemas.microsoft.com/office/drawing/2014/main" id="{B25B71D5-36BF-697C-FD47-D91A8884B7B1}"/>
+              </a:ext>
+            </a:extLst>
+          </p:cNvPr>
+          <p:cNvSpPr/>
+          <p:nvPr/>
+        </p:nvSpPr>
+        <p:spPr>
+          <a:xfrm>
+            <a:off x="5885188" y="1046289"/>
+            <a:ext cx="1337457" cy="1257328"/>
+          </a:xfrm>
+          <a:prstGeom prst="roundRect">
+            <a:avLst>
+              <a:gd name="adj" fmla="val 4900"/>
+            </a:avLst>
+          </a:prstGeom>
+          <a:solidFill>
+            <a:schemeClr val="bg1"/>
+          </a:solidFill>
+          <a:ln w="12700">
+            <a:solidFill>
+              <a:schemeClr val="bg2">
+                <a:lumMod val="75000"/>
+              </a:schemeClr>
+            </a:solidFill>
+          </a:ln>
+          <a:effectLst>
+            <a:outerShdw blurRad="50800" dist="38100" dir="2700000" algn="tl" rotWithShape="0">
+              <a:prstClr val="black">
+                <a:alpha val="40000"/>
+              </a:prstClr>
+            </a:outerShdw>
+          </a:effectLst>
+        </p:spPr>
+        <p:style>
+          <a:lnRef idx="2">
+            <a:schemeClr val="accent1">
+              <a:shade val="50000"/>
+            </a:schemeClr>
+          </a:lnRef>
+          <a:fillRef idx="1">
+            <a:schemeClr val="accent1"/>
+          </a:fillRef>
+          <a:effectRef idx="0">
+            <a:schemeClr val="accent1"/>
+          </a:effectRef>
+          <a:fontRef idx="minor">
+            <a:schemeClr val="lt1"/>
+          </a:fontRef>
+        </p:style>
+        <p:txBody>
+          <a:bodyPr rtlCol="0" anchor="ctr"/>
           <a:lstStyle/>
           <a:p>
-            <a:endParaRPr lang="en-KR"/>
-          </a:p>
-        </p:txBody>
-      </p:sp>
-      <p:sp>
-        <p:nvSpPr>
-          <p:cNvPr id="3" name="Subtitle 2">
-            <a:extLst>
-              <a:ext uri="{FF2B5EF4-FFF2-40B4-BE49-F238E27FC236}">
-                <a16:creationId xmlns:a16="http://schemas.microsoft.com/office/drawing/2014/main" id="{E8D29B24-CC65-084D-4D88-CD64C443FCFD}"/>
-              </a:ext>
-            </a:extLst>
-          </p:cNvPr>
-          <p:cNvSpPr>
-            <a:spLocks noGrp="1"/>
-          </p:cNvSpPr>
-          <p:nvPr>
-            <p:ph type="subTitle" idx="1"/>
-          </p:nvPr>
-        </p:nvSpPr>
-        <p:spPr/>
-        <p:txBody>
-          <a:bodyPr/>
+            <a:pPr algn="ctr"/>
+            <a:endParaRPr lang="ko-KR" altLang="en-US" sz="1050" dirty="0"/>
+          </a:p>
+        </p:txBody>
+      </p:sp>
+      <p:sp>
+        <p:nvSpPr>
+          <p:cNvPr id="25" name="TextBox 24">
+            <a:extLst>
+              <a:ext uri="{FF2B5EF4-FFF2-40B4-BE49-F238E27FC236}">
+                <a16:creationId xmlns:a16="http://schemas.microsoft.com/office/drawing/2014/main" id="{10D63CAA-22B0-7F24-0D78-54CE5EFE0ED0}"/>
+              </a:ext>
+            </a:extLst>
+          </p:cNvPr>
+          <p:cNvSpPr txBox="1"/>
+          <p:nvPr/>
+        </p:nvSpPr>
+        <p:spPr>
+          <a:xfrm>
+            <a:off x="5975213" y="1086381"/>
+            <a:ext cx="1337456" cy="479316"/>
+          </a:xfrm>
+          <a:prstGeom prst="rect">
+            <a:avLst/>
+          </a:prstGeom>
+          <a:noFill/>
+        </p:spPr>
+        <p:txBody>
+          <a:bodyPr wrap="square" rtlCol="0">
+            <a:spAutoFit/>
+          </a:bodyPr>
           <a:lstStyle/>
           <a:p>
-            <a:endParaRPr lang="en-KR"/>
-          </a:p>
-        </p:txBody>
-      </p:sp>
+            <a:pPr algn="ctr"/>
+            <a:r>
+              <a:rPr lang="en-US" altLang="ko-KR" sz="1200" spc="-50" dirty="0">
+                <a:latin typeface="Noto Sans KR" panose="020B0200000000000000" pitchFamily="34" charset="-128"/>
+                <a:ea typeface="Noto Sans KR" panose="020B0200000000000000" pitchFamily="34" charset="-128"/>
+              </a:rPr>
+              <a:t>Vibration characteristics</a:t>
+            </a:r>
+            <a:endParaRPr lang="ko-KR" altLang="en-US" sz="1200" spc="-50" dirty="0">
+              <a:latin typeface="Noto Sans KR" panose="020B0200000000000000" pitchFamily="34" charset="-128"/>
+              <a:ea typeface="Noto Sans KR" panose="020B0200000000000000" pitchFamily="34" charset="-128"/>
+            </a:endParaRPr>
+          </a:p>
+        </p:txBody>
+      </p:sp>
+      <p:cxnSp>
+        <p:nvCxnSpPr>
+          <p:cNvPr id="20" name="직선 화살표 연결선 224">
+            <a:extLst>
+              <a:ext uri="{FF2B5EF4-FFF2-40B4-BE49-F238E27FC236}">
+                <a16:creationId xmlns:a16="http://schemas.microsoft.com/office/drawing/2014/main" id="{B6039FFF-50EE-4C01-CB51-90B487369958}"/>
+              </a:ext>
+            </a:extLst>
+          </p:cNvPr>
+          <p:cNvCxnSpPr>
+            <a:cxnSpLocks/>
+          </p:cNvCxnSpPr>
+          <p:nvPr/>
+        </p:nvCxnSpPr>
+        <p:spPr>
+          <a:xfrm flipV="1">
+            <a:off x="6289525" y="1506202"/>
+            <a:ext cx="0" cy="637816"/>
+          </a:xfrm>
+          <a:prstGeom prst="straightConnector1">
+            <a:avLst/>
+          </a:prstGeom>
+          <a:ln w="19050">
+            <a:solidFill>
+              <a:schemeClr val="tx1"/>
+            </a:solidFill>
+            <a:tailEnd type="triangle"/>
+          </a:ln>
+        </p:spPr>
+        <p:style>
+          <a:lnRef idx="1">
+            <a:schemeClr val="accent1"/>
+          </a:lnRef>
+          <a:fillRef idx="0">
+            <a:schemeClr val="accent1"/>
+          </a:fillRef>
+          <a:effectRef idx="0">
+            <a:schemeClr val="accent1"/>
+          </a:effectRef>
+          <a:fontRef idx="minor">
+            <a:schemeClr val="tx1"/>
+          </a:fontRef>
+        </p:style>
+      </p:cxnSp>
+      <p:cxnSp>
+        <p:nvCxnSpPr>
+          <p:cNvPr id="21" name="직선 화살표 연결선 225">
+            <a:extLst>
+              <a:ext uri="{FF2B5EF4-FFF2-40B4-BE49-F238E27FC236}">
+                <a16:creationId xmlns:a16="http://schemas.microsoft.com/office/drawing/2014/main" id="{7623246F-8C21-F704-D508-3A68FDEFE220}"/>
+              </a:ext>
+            </a:extLst>
+          </p:cNvPr>
+          <p:cNvCxnSpPr>
+            <a:cxnSpLocks/>
+          </p:cNvCxnSpPr>
+          <p:nvPr/>
+        </p:nvCxnSpPr>
+        <p:spPr>
+          <a:xfrm rot="5400000" flipV="1">
+            <a:off x="6633380" y="1430178"/>
+            <a:ext cx="0" cy="687707"/>
+          </a:xfrm>
+          <a:prstGeom prst="straightConnector1">
+            <a:avLst/>
+          </a:prstGeom>
+          <a:ln w="19050">
+            <a:solidFill>
+              <a:schemeClr val="tx1"/>
+            </a:solidFill>
+            <a:tailEnd type="triangle"/>
+          </a:ln>
+        </p:spPr>
+        <p:style>
+          <a:lnRef idx="1">
+            <a:schemeClr val="accent1"/>
+          </a:lnRef>
+          <a:fillRef idx="0">
+            <a:schemeClr val="accent1"/>
+          </a:fillRef>
+          <a:effectRef idx="0">
+            <a:schemeClr val="accent1"/>
+          </a:effectRef>
+          <a:fontRef idx="minor">
+            <a:schemeClr val="tx1"/>
+          </a:fontRef>
+        </p:style>
+      </p:cxnSp>
+      <p:sp>
+        <p:nvSpPr>
+          <p:cNvPr id="22" name="자유형: 도형 226">
+            <a:extLst>
+              <a:ext uri="{FF2B5EF4-FFF2-40B4-BE49-F238E27FC236}">
+                <a16:creationId xmlns:a16="http://schemas.microsoft.com/office/drawing/2014/main" id="{5AD8CC8B-FB6A-2BB4-98D4-AD1BED685C61}"/>
+              </a:ext>
+            </a:extLst>
+          </p:cNvPr>
+          <p:cNvSpPr/>
+          <p:nvPr/>
+        </p:nvSpPr>
+        <p:spPr>
+          <a:xfrm>
+            <a:off x="6301506" y="1679159"/>
+            <a:ext cx="621165" cy="419829"/>
+          </a:xfrm>
+          <a:custGeom>
+            <a:avLst/>
+            <a:gdLst>
+              <a:gd name="connsiteX0" fmla="*/ 0 w 1790700"/>
+              <a:gd name="connsiteY0" fmla="*/ 212596 h 1077238"/>
+              <a:gd name="connsiteX1" fmla="*/ 50800 w 1790700"/>
+              <a:gd name="connsiteY1" fmla="*/ 15746 h 1077238"/>
+              <a:gd name="connsiteX2" fmla="*/ 139700 w 1790700"/>
+              <a:gd name="connsiteY2" fmla="*/ 580896 h 1077238"/>
+              <a:gd name="connsiteX3" fmla="*/ 203200 w 1790700"/>
+              <a:gd name="connsiteY3" fmla="*/ 517396 h 1077238"/>
+              <a:gd name="connsiteX4" fmla="*/ 254000 w 1790700"/>
+              <a:gd name="connsiteY4" fmla="*/ 733296 h 1077238"/>
+              <a:gd name="connsiteX5" fmla="*/ 323850 w 1790700"/>
+              <a:gd name="connsiteY5" fmla="*/ 606296 h 1077238"/>
+              <a:gd name="connsiteX6" fmla="*/ 469900 w 1790700"/>
+              <a:gd name="connsiteY6" fmla="*/ 1019046 h 1077238"/>
+              <a:gd name="connsiteX7" fmla="*/ 654050 w 1790700"/>
+              <a:gd name="connsiteY7" fmla="*/ 530096 h 1077238"/>
+              <a:gd name="connsiteX8" fmla="*/ 762000 w 1790700"/>
+              <a:gd name="connsiteY8" fmla="*/ 1044446 h 1077238"/>
+              <a:gd name="connsiteX9" fmla="*/ 825500 w 1790700"/>
+              <a:gd name="connsiteY9" fmla="*/ 923796 h 1077238"/>
+              <a:gd name="connsiteX10" fmla="*/ 908050 w 1790700"/>
+              <a:gd name="connsiteY10" fmla="*/ 1019046 h 1077238"/>
+              <a:gd name="connsiteX11" fmla="*/ 1073150 w 1790700"/>
+              <a:gd name="connsiteY11" fmla="*/ 860296 h 1077238"/>
+              <a:gd name="connsiteX12" fmla="*/ 1168400 w 1790700"/>
+              <a:gd name="connsiteY12" fmla="*/ 1031746 h 1077238"/>
+              <a:gd name="connsiteX13" fmla="*/ 1308100 w 1790700"/>
+              <a:gd name="connsiteY13" fmla="*/ 879346 h 1077238"/>
+              <a:gd name="connsiteX14" fmla="*/ 1485900 w 1790700"/>
+              <a:gd name="connsiteY14" fmla="*/ 1076196 h 1077238"/>
+              <a:gd name="connsiteX15" fmla="*/ 1555750 w 1790700"/>
+              <a:gd name="connsiteY15" fmla="*/ 961896 h 1077238"/>
+              <a:gd name="connsiteX16" fmla="*/ 1670050 w 1790700"/>
+              <a:gd name="connsiteY16" fmla="*/ 1069846 h 1077238"/>
+              <a:gd name="connsiteX17" fmla="*/ 1790700 w 1790700"/>
+              <a:gd name="connsiteY17" fmla="*/ 733296 h 1077238"/>
+            </a:gdLst>
+            <a:ahLst/>
+            <a:cxnLst>
+              <a:cxn ang="0">
+                <a:pos x="connsiteX0" y="connsiteY0"/>
+              </a:cxn>
+              <a:cxn ang="0">
+                <a:pos x="connsiteX1" y="connsiteY1"/>
+              </a:cxn>
+              <a:cxn ang="0">
+                <a:pos x="connsiteX2" y="connsiteY2"/>
+              </a:cxn>
+              <a:cxn ang="0">
+                <a:pos x="connsiteX3" y="connsiteY3"/>
+              </a:cxn>
+              <a:cxn ang="0">
+                <a:pos x="connsiteX4" y="connsiteY4"/>
+              </a:cxn>
+              <a:cxn ang="0">
+                <a:pos x="connsiteX5" y="connsiteY5"/>
+              </a:cxn>
+              <a:cxn ang="0">
+                <a:pos x="connsiteX6" y="connsiteY6"/>
+              </a:cxn>
+              <a:cxn ang="0">
+                <a:pos x="connsiteX7" y="connsiteY7"/>
+              </a:cxn>
+              <a:cxn ang="0">
+                <a:pos x="connsiteX8" y="connsiteY8"/>
+              </a:cxn>
+              <a:cxn ang="0">
+                <a:pos x="connsiteX9" y="connsiteY9"/>
+              </a:cxn>
+              <a:cxn ang="0">
+                <a:pos x="connsiteX10" y="connsiteY10"/>
+              </a:cxn>
+              <a:cxn ang="0">
+                <a:pos x="connsiteX11" y="connsiteY11"/>
+              </a:cxn>
+              <a:cxn ang="0">
+                <a:pos x="connsiteX12" y="connsiteY12"/>
+              </a:cxn>
+              <a:cxn ang="0">
+                <a:pos x="connsiteX13" y="connsiteY13"/>
+              </a:cxn>
+              <a:cxn ang="0">
+                <a:pos x="connsiteX14" y="connsiteY14"/>
+              </a:cxn>
+              <a:cxn ang="0">
+                <a:pos x="connsiteX15" y="connsiteY15"/>
+              </a:cxn>
+              <a:cxn ang="0">
+                <a:pos x="connsiteX16" y="connsiteY16"/>
+              </a:cxn>
+              <a:cxn ang="0">
+                <a:pos x="connsiteX17" y="connsiteY17"/>
+              </a:cxn>
+            </a:cxnLst>
+            <a:rect l="l" t="t" r="r" b="b"/>
+            <a:pathLst>
+              <a:path w="1790700" h="1077238">
+                <a:moveTo>
+                  <a:pt x="0" y="212596"/>
+                </a:moveTo>
+                <a:cubicBezTo>
+                  <a:pt x="13758" y="83479"/>
+                  <a:pt x="27517" y="-45637"/>
+                  <a:pt x="50800" y="15746"/>
+                </a:cubicBezTo>
+                <a:cubicBezTo>
+                  <a:pt x="74083" y="77129"/>
+                  <a:pt x="114300" y="497288"/>
+                  <a:pt x="139700" y="580896"/>
+                </a:cubicBezTo>
+                <a:cubicBezTo>
+                  <a:pt x="165100" y="664504"/>
+                  <a:pt x="184150" y="491996"/>
+                  <a:pt x="203200" y="517396"/>
+                </a:cubicBezTo>
+                <a:cubicBezTo>
+                  <a:pt x="222250" y="542796"/>
+                  <a:pt x="233892" y="718479"/>
+                  <a:pt x="254000" y="733296"/>
+                </a:cubicBezTo>
+                <a:cubicBezTo>
+                  <a:pt x="274108" y="748113"/>
+                  <a:pt x="287867" y="558671"/>
+                  <a:pt x="323850" y="606296"/>
+                </a:cubicBezTo>
+                <a:cubicBezTo>
+                  <a:pt x="359833" y="653921"/>
+                  <a:pt x="414867" y="1031746"/>
+                  <a:pt x="469900" y="1019046"/>
+                </a:cubicBezTo>
+                <a:cubicBezTo>
+                  <a:pt x="524933" y="1006346"/>
+                  <a:pt x="605367" y="525863"/>
+                  <a:pt x="654050" y="530096"/>
+                </a:cubicBezTo>
+                <a:cubicBezTo>
+                  <a:pt x="702733" y="534329"/>
+                  <a:pt x="733425" y="978829"/>
+                  <a:pt x="762000" y="1044446"/>
+                </a:cubicBezTo>
+                <a:cubicBezTo>
+                  <a:pt x="790575" y="1110063"/>
+                  <a:pt x="801158" y="928029"/>
+                  <a:pt x="825500" y="923796"/>
+                </a:cubicBezTo>
+                <a:cubicBezTo>
+                  <a:pt x="849842" y="919563"/>
+                  <a:pt x="866775" y="1029629"/>
+                  <a:pt x="908050" y="1019046"/>
+                </a:cubicBezTo>
+                <a:cubicBezTo>
+                  <a:pt x="949325" y="1008463"/>
+                  <a:pt x="1029758" y="858179"/>
+                  <a:pt x="1073150" y="860296"/>
+                </a:cubicBezTo>
+                <a:cubicBezTo>
+                  <a:pt x="1116542" y="862413"/>
+                  <a:pt x="1129242" y="1028571"/>
+                  <a:pt x="1168400" y="1031746"/>
+                </a:cubicBezTo>
+                <a:cubicBezTo>
+                  <a:pt x="1207558" y="1034921"/>
+                  <a:pt x="1255183" y="871938"/>
+                  <a:pt x="1308100" y="879346"/>
+                </a:cubicBezTo>
+                <a:cubicBezTo>
+                  <a:pt x="1361017" y="886754"/>
+                  <a:pt x="1444625" y="1062438"/>
+                  <a:pt x="1485900" y="1076196"/>
+                </a:cubicBezTo>
+                <a:cubicBezTo>
+                  <a:pt x="1527175" y="1089954"/>
+                  <a:pt x="1525058" y="962954"/>
+                  <a:pt x="1555750" y="961896"/>
+                </a:cubicBezTo>
+                <a:cubicBezTo>
+                  <a:pt x="1586442" y="960838"/>
+                  <a:pt x="1630892" y="1107946"/>
+                  <a:pt x="1670050" y="1069846"/>
+                </a:cubicBezTo>
+                <a:cubicBezTo>
+                  <a:pt x="1709208" y="1031746"/>
+                  <a:pt x="1749954" y="882521"/>
+                  <a:pt x="1790700" y="733296"/>
+                </a:cubicBezTo>
+              </a:path>
+            </a:pathLst>
+          </a:custGeom>
+          <a:noFill/>
+          <a:ln w="19050">
+            <a:solidFill>
+              <a:srgbClr val="1364D5"/>
+            </a:solidFill>
+          </a:ln>
+        </p:spPr>
+        <p:style>
+          <a:lnRef idx="2">
+            <a:schemeClr val="accent1">
+              <a:shade val="50000"/>
+            </a:schemeClr>
+          </a:lnRef>
+          <a:fillRef idx="1">
+            <a:schemeClr val="accent1"/>
+          </a:fillRef>
+          <a:effectRef idx="0">
+            <a:schemeClr val="accent1"/>
+          </a:effectRef>
+          <a:fontRef idx="minor">
+            <a:schemeClr val="lt1"/>
+          </a:fontRef>
+        </p:style>
+        <p:txBody>
+          <a:bodyPr rtlCol="0" anchor="ctr"/>
+          <a:lstStyle/>
+          <a:p>
+            <a:pPr algn="ctr"/>
+            <a:endParaRPr lang="ko-KR" altLang="en-US" sz="1050"/>
+          </a:p>
+        </p:txBody>
+      </p:sp>
+      <p:sp>
+        <p:nvSpPr>
+          <p:cNvPr id="23" name="직사각형 227">
+            <a:extLst>
+              <a:ext uri="{FF2B5EF4-FFF2-40B4-BE49-F238E27FC236}">
+                <a16:creationId xmlns:a16="http://schemas.microsoft.com/office/drawing/2014/main" id="{E109BCED-2F44-5A56-E635-061B1C5A028E}"/>
+              </a:ext>
+            </a:extLst>
+          </p:cNvPr>
+          <p:cNvSpPr/>
+          <p:nvPr/>
+        </p:nvSpPr>
+        <p:spPr>
+          <a:xfrm>
+            <a:off x="5891139" y="1495655"/>
+            <a:ext cx="431528" cy="261610"/>
+          </a:xfrm>
+          <a:prstGeom prst="rect">
+            <a:avLst/>
+          </a:prstGeom>
+        </p:spPr>
+        <p:txBody>
+          <a:bodyPr wrap="none">
+            <a:spAutoFit/>
+          </a:bodyPr>
+          <a:lstStyle/>
+          <a:p>
+            <a:r>
+              <a:rPr lang="en-US" altLang="ko-KR" sz="1100" b="1" dirty="0">
+                <a:solidFill>
+                  <a:schemeClr val="tx1"/>
+                </a:solidFill>
+              </a:rPr>
+              <a:t>[dB]</a:t>
+            </a:r>
+            <a:endParaRPr lang="ko-KR" altLang="en-US" sz="1000" dirty="0"/>
+          </a:p>
+        </p:txBody>
+      </p:sp>
+      <p:sp>
+        <p:nvSpPr>
+          <p:cNvPr id="17" name="사각형: 둥근 모서리 221">
+            <a:extLst>
+              <a:ext uri="{FF2B5EF4-FFF2-40B4-BE49-F238E27FC236}">
+                <a16:creationId xmlns:a16="http://schemas.microsoft.com/office/drawing/2014/main" id="{87ED0CE5-0668-6ADA-D93E-B06861EED332}"/>
+              </a:ext>
+            </a:extLst>
+          </p:cNvPr>
+          <p:cNvSpPr/>
+          <p:nvPr/>
+        </p:nvSpPr>
+        <p:spPr>
+          <a:xfrm>
+            <a:off x="3671223" y="1043240"/>
+            <a:ext cx="1466414" cy="1257328"/>
+          </a:xfrm>
+          <a:prstGeom prst="roundRect">
+            <a:avLst>
+              <a:gd name="adj" fmla="val 4900"/>
+            </a:avLst>
+          </a:prstGeom>
+          <a:solidFill>
+            <a:schemeClr val="bg1"/>
+          </a:solidFill>
+          <a:ln>
+            <a:solidFill>
+              <a:schemeClr val="bg2">
+                <a:lumMod val="75000"/>
+              </a:schemeClr>
+            </a:solidFill>
+          </a:ln>
+          <a:effectLst>
+            <a:outerShdw blurRad="50800" dist="38100" dir="2700000" algn="tl" rotWithShape="0">
+              <a:prstClr val="black">
+                <a:alpha val="40000"/>
+              </a:prstClr>
+            </a:outerShdw>
+          </a:effectLst>
+        </p:spPr>
+        <p:style>
+          <a:lnRef idx="2">
+            <a:schemeClr val="accent1">
+              <a:shade val="50000"/>
+            </a:schemeClr>
+          </a:lnRef>
+          <a:fillRef idx="1">
+            <a:schemeClr val="accent1"/>
+          </a:fillRef>
+          <a:effectRef idx="0">
+            <a:schemeClr val="accent1"/>
+          </a:effectRef>
+          <a:fontRef idx="minor">
+            <a:schemeClr val="lt1"/>
+          </a:fontRef>
+        </p:style>
+        <p:txBody>
+          <a:bodyPr rtlCol="0" anchor="ctr"/>
+          <a:lstStyle/>
+          <a:p>
+            <a:pPr algn="ctr"/>
+            <a:endParaRPr lang="ko-KR" altLang="en-US" sz="1050" dirty="0"/>
+          </a:p>
+        </p:txBody>
+      </p:sp>
+      <p:sp>
+        <p:nvSpPr>
+          <p:cNvPr id="18" name="TextBox 17">
+            <a:extLst>
+              <a:ext uri="{FF2B5EF4-FFF2-40B4-BE49-F238E27FC236}">
+                <a16:creationId xmlns:a16="http://schemas.microsoft.com/office/drawing/2014/main" id="{C7034261-B69C-42ED-2AE2-C61151A974D3}"/>
+              </a:ext>
+            </a:extLst>
+          </p:cNvPr>
+          <p:cNvSpPr txBox="1"/>
+          <p:nvPr/>
+        </p:nvSpPr>
+        <p:spPr>
+          <a:xfrm>
+            <a:off x="3676298" y="1086380"/>
+            <a:ext cx="1357973" cy="461665"/>
+          </a:xfrm>
+          <a:prstGeom prst="rect">
+            <a:avLst/>
+          </a:prstGeom>
+          <a:noFill/>
+        </p:spPr>
+        <p:txBody>
+          <a:bodyPr wrap="square" rtlCol="0">
+            <a:spAutoFit/>
+          </a:bodyPr>
+          <a:lstStyle/>
+          <a:p>
+            <a:pPr algn="ctr"/>
+            <a:r>
+              <a:rPr lang="en-US" altLang="ko-KR" sz="1200" spc="-50" dirty="0">
+                <a:solidFill>
+                  <a:schemeClr val="tx1"/>
+                </a:solidFill>
+                <a:latin typeface="Noto Sans KR" panose="020B0200000000000000" pitchFamily="34" charset="-128"/>
+                <a:ea typeface="Noto Sans KR" panose="020B0200000000000000" pitchFamily="34" charset="-128"/>
+              </a:rPr>
+              <a:t>Design variables</a:t>
+            </a:r>
+          </a:p>
+          <a:p>
+            <a:pPr algn="ctr"/>
+            <a:r>
+              <a:rPr lang="en-US" altLang="ko-KR" sz="1200" spc="-50" dirty="0">
+                <a:latin typeface="Noto Sans KR" panose="020B0200000000000000" pitchFamily="34" charset="-128"/>
+                <a:ea typeface="Noto Sans KR" panose="020B0200000000000000" pitchFamily="34" charset="-128"/>
+              </a:rPr>
+              <a:t>(w</a:t>
+            </a:r>
+            <a:r>
+              <a:rPr lang="en-US" altLang="ko-KR" sz="1200" spc="-50" baseline="-25000" dirty="0">
+                <a:latin typeface="Noto Sans KR" panose="020B0200000000000000" pitchFamily="34" charset="-128"/>
+                <a:ea typeface="Noto Sans KR" panose="020B0200000000000000" pitchFamily="34" charset="-128"/>
+              </a:rPr>
+              <a:t>1</a:t>
+            </a:r>
+            <a:r>
+              <a:rPr lang="en-US" altLang="ko-KR" sz="1200" spc="-50" dirty="0">
+                <a:latin typeface="Noto Sans KR" panose="020B0200000000000000" pitchFamily="34" charset="-128"/>
+                <a:ea typeface="Noto Sans KR" panose="020B0200000000000000" pitchFamily="34" charset="-128"/>
+              </a:rPr>
+              <a:t>, w</a:t>
+            </a:r>
+            <a:r>
+              <a:rPr lang="en-US" altLang="ko-KR" sz="1200" spc="-50" baseline="-25000" dirty="0">
+                <a:latin typeface="Noto Sans KR" panose="020B0200000000000000" pitchFamily="34" charset="-128"/>
+                <a:ea typeface="Noto Sans KR" panose="020B0200000000000000" pitchFamily="34" charset="-128"/>
+              </a:rPr>
+              <a:t>2</a:t>
+            </a:r>
+            <a:r>
+              <a:rPr lang="en-US" altLang="ko-KR" sz="1200" spc="-50" dirty="0">
+                <a:latin typeface="Noto Sans KR" panose="020B0200000000000000" pitchFamily="34" charset="-128"/>
+                <a:ea typeface="Noto Sans KR" panose="020B0200000000000000" pitchFamily="34" charset="-128"/>
+              </a:rPr>
+              <a:t>, d, a, b, t, h)</a:t>
+            </a:r>
+            <a:endParaRPr lang="en-US" altLang="ko-KR" sz="1200" spc="-50" dirty="0">
+              <a:solidFill>
+                <a:schemeClr val="tx1"/>
+              </a:solidFill>
+              <a:latin typeface="Noto Sans KR" panose="020B0200000000000000" pitchFamily="34" charset="-128"/>
+              <a:ea typeface="Noto Sans KR" panose="020B0200000000000000" pitchFamily="34" charset="-128"/>
+            </a:endParaRPr>
+          </a:p>
+        </p:txBody>
+      </p:sp>
+      <p:pic>
+        <p:nvPicPr>
+          <p:cNvPr id="16" name="그래픽 220" descr="머리 안의 뇌">
+            <a:extLst>
+              <a:ext uri="{FF2B5EF4-FFF2-40B4-BE49-F238E27FC236}">
+                <a16:creationId xmlns:a16="http://schemas.microsoft.com/office/drawing/2014/main" id="{41D71C5D-AA7F-3B32-5DA5-178D2F11112B}"/>
+              </a:ext>
+            </a:extLst>
+          </p:cNvPr>
+          <p:cNvPicPr>
+            <a:picLocks noChangeAspect="1"/>
+          </p:cNvPicPr>
+          <p:nvPr/>
+        </p:nvPicPr>
+        <p:blipFill>
+          <a:blip r:embed="rId3">
+            <a:extLst>
+              <a:ext uri="{28A0092B-C50C-407E-A947-70E740481C1C}">
+                <a14:useLocalDpi xmlns:a14="http://schemas.microsoft.com/office/drawing/2010/main" val="0"/>
+              </a:ext>
+              <a:ext uri="{96DAC541-7B7A-43D3-8B79-37D633B846F1}">
+                <asvg:svgBlip xmlns:asvg="http://schemas.microsoft.com/office/drawing/2016/SVG/main" r:embed="rId4"/>
+              </a:ext>
+            </a:extLst>
+          </a:blip>
+          <a:stretch>
+            <a:fillRect/>
+          </a:stretch>
+        </p:blipFill>
+        <p:spPr>
+          <a:xfrm>
+            <a:off x="4106570" y="1665335"/>
+            <a:ext cx="640667" cy="640667"/>
+          </a:xfrm>
+          <a:prstGeom prst="rect">
+            <a:avLst/>
+          </a:prstGeom>
+        </p:spPr>
+      </p:pic>
+      <p:pic>
+        <p:nvPicPr>
+          <p:cNvPr id="13" name="Picture 2" descr="COMSOL (@COMSOL_Inc) / Twitter">
+            <a:extLst>
+              <a:ext uri="{FF2B5EF4-FFF2-40B4-BE49-F238E27FC236}">
+                <a16:creationId xmlns:a16="http://schemas.microsoft.com/office/drawing/2014/main" id="{2730D98B-05BC-2EFE-024F-2873C4AEC95E}"/>
+              </a:ext>
+            </a:extLst>
+          </p:cNvPr>
+          <p:cNvPicPr>
+            <a:picLocks noChangeAspect="1" noChangeArrowheads="1"/>
+          </p:cNvPicPr>
+          <p:nvPr/>
+        </p:nvPicPr>
+        <p:blipFill>
+          <a:blip r:embed="rId5" cstate="print">
+            <a:extLst>
+              <a:ext uri="{28A0092B-C50C-407E-A947-70E740481C1C}">
+                <a14:useLocalDpi xmlns:a14="http://schemas.microsoft.com/office/drawing/2010/main" val="0"/>
+              </a:ext>
+            </a:extLst>
+          </a:blip>
+          <a:srcRect/>
+          <a:stretch>
+            <a:fillRect/>
+          </a:stretch>
+        </p:blipFill>
+        <p:spPr bwMode="auto">
+          <a:xfrm>
+            <a:off x="5248612" y="758789"/>
+            <a:ext cx="485555" cy="485555"/>
+          </a:xfrm>
+          <a:prstGeom prst="rect">
+            <a:avLst/>
+          </a:prstGeom>
+          <a:noFill/>
+          <a:ln>
+            <a:solidFill>
+              <a:schemeClr val="bg2">
+                <a:lumMod val="90000"/>
+              </a:schemeClr>
+            </a:solidFill>
+          </a:ln>
+          <a:effectLst>
+            <a:outerShdw blurRad="50800" dist="38100" dir="2700000" algn="tl" rotWithShape="0">
+              <a:prstClr val="black">
+                <a:alpha val="40000"/>
+              </a:prstClr>
+            </a:outerShdw>
+          </a:effectLst>
+          <a:extLst>
+            <a:ext uri="{909E8E84-426E-40DD-AFC4-6F175D3DCCD1}">
+              <a14:hiddenFill xmlns:a14="http://schemas.microsoft.com/office/drawing/2010/main">
+                <a:solidFill>
+                  <a:srgbClr val="FFFFFF"/>
+                </a:solidFill>
+              </a14:hiddenFill>
+            </a:ext>
+          </a:extLst>
+        </p:spPr>
+      </p:pic>
+      <p:pic>
+        <p:nvPicPr>
+          <p:cNvPr id="14" name="Picture 4" descr="Matlab Niveau 1 - Ackware - Centre de formation à Reims">
+            <a:extLst>
+              <a:ext uri="{FF2B5EF4-FFF2-40B4-BE49-F238E27FC236}">
+                <a16:creationId xmlns:a16="http://schemas.microsoft.com/office/drawing/2014/main" id="{8164D639-621D-EEAC-DA5E-35E71D7EADE9}"/>
+              </a:ext>
+            </a:extLst>
+          </p:cNvPr>
+          <p:cNvPicPr>
+            <a:picLocks noChangeAspect="1" noChangeArrowheads="1"/>
+          </p:cNvPicPr>
+          <p:nvPr/>
+        </p:nvPicPr>
+        <p:blipFill rotWithShape="1">
+          <a:blip r:embed="rId6" cstate="print">
+            <a:extLst>
+              <a:ext uri="{28A0092B-C50C-407E-A947-70E740481C1C}">
+                <a14:useLocalDpi xmlns:a14="http://schemas.microsoft.com/office/drawing/2010/main" val="0"/>
+              </a:ext>
+            </a:extLst>
+          </a:blip>
+          <a:srcRect l="22494" t="5663" r="20840" b="5915"/>
+          <a:stretch/>
+        </p:blipFill>
+        <p:spPr bwMode="auto">
+          <a:xfrm>
+            <a:off x="5233696" y="2098988"/>
+            <a:ext cx="487440" cy="456356"/>
+          </a:xfrm>
+          <a:prstGeom prst="rect">
+            <a:avLst/>
+          </a:prstGeom>
+          <a:noFill/>
+          <a:ln>
+            <a:solidFill>
+              <a:schemeClr val="bg2">
+                <a:lumMod val="90000"/>
+              </a:schemeClr>
+            </a:solidFill>
+          </a:ln>
+          <a:effectLst>
+            <a:outerShdw blurRad="50800" dist="38100" dir="2700000" algn="tl" rotWithShape="0">
+              <a:prstClr val="black">
+                <a:alpha val="40000"/>
+              </a:prstClr>
+            </a:outerShdw>
+          </a:effectLst>
+          <a:extLst>
+            <a:ext uri="{909E8E84-426E-40DD-AFC4-6F175D3DCCD1}">
+              <a14:hiddenFill xmlns:a14="http://schemas.microsoft.com/office/drawing/2010/main">
+                <a:solidFill>
+                  <a:srgbClr val="FFFFFF"/>
+                </a:solidFill>
+              </a14:hiddenFill>
+            </a:ext>
+          </a:extLst>
+        </p:spPr>
+      </p:pic>
+      <p:pic>
+        <p:nvPicPr>
+          <p:cNvPr id="26" name="Picture 25">
+            <a:extLst>
+              <a:ext uri="{FF2B5EF4-FFF2-40B4-BE49-F238E27FC236}">
+                <a16:creationId xmlns:a16="http://schemas.microsoft.com/office/drawing/2014/main" id="{16384981-3754-C030-EE8D-38F79821F72C}"/>
+              </a:ext>
+            </a:extLst>
+          </p:cNvPr>
+          <p:cNvPicPr>
+            <a:picLocks noChangeAspect="1"/>
+          </p:cNvPicPr>
+          <p:nvPr/>
+        </p:nvPicPr>
+        <p:blipFill>
+          <a:blip r:embed="rId7"/>
+          <a:stretch>
+            <a:fillRect/>
+          </a:stretch>
+        </p:blipFill>
+        <p:spPr>
+          <a:xfrm>
+            <a:off x="1194692" y="572470"/>
+            <a:ext cx="2296836" cy="2585384"/>
+          </a:xfrm>
+          <a:prstGeom prst="rect">
+            <a:avLst/>
+          </a:prstGeom>
+        </p:spPr>
+      </p:pic>
+      <p:pic>
+        <p:nvPicPr>
+          <p:cNvPr id="27" name="그림 266">
+            <a:extLst>
+              <a:ext uri="{FF2B5EF4-FFF2-40B4-BE49-F238E27FC236}">
+                <a16:creationId xmlns:a16="http://schemas.microsoft.com/office/drawing/2014/main" id="{DECFD680-C6DB-F1B2-CBE0-A2564F2FDDD1}"/>
+              </a:ext>
+            </a:extLst>
+          </p:cNvPr>
+          <p:cNvPicPr>
+            <a:picLocks noChangeAspect="1"/>
+          </p:cNvPicPr>
+          <p:nvPr/>
+        </p:nvPicPr>
+        <p:blipFill>
+          <a:blip r:embed="rId8"/>
+          <a:stretch>
+            <a:fillRect/>
+          </a:stretch>
+        </p:blipFill>
+        <p:spPr>
+          <a:xfrm>
+            <a:off x="3230980" y="1699107"/>
+            <a:ext cx="383254" cy="332111"/>
+          </a:xfrm>
+          <a:prstGeom prst="rect">
+            <a:avLst/>
+          </a:prstGeom>
+        </p:spPr>
+      </p:pic>
+      <p:pic>
+        <p:nvPicPr>
+          <p:cNvPr id="29" name="Picture 28">
+            <a:extLst>
+              <a:ext uri="{FF2B5EF4-FFF2-40B4-BE49-F238E27FC236}">
+                <a16:creationId xmlns:a16="http://schemas.microsoft.com/office/drawing/2014/main" id="{A26B431D-8D83-A670-587F-8D21166AFCAF}"/>
+              </a:ext>
+            </a:extLst>
+          </p:cNvPr>
+          <p:cNvPicPr>
+            <a:picLocks noChangeAspect="1"/>
+          </p:cNvPicPr>
+          <p:nvPr/>
+        </p:nvPicPr>
+        <p:blipFill>
+          <a:blip r:embed="rId9"/>
+          <a:stretch>
+            <a:fillRect/>
+          </a:stretch>
+        </p:blipFill>
+        <p:spPr>
+          <a:xfrm>
+            <a:off x="8953795" y="6009536"/>
+            <a:ext cx="7772400" cy="1305567"/>
+          </a:xfrm>
+          <a:prstGeom prst="rect">
+            <a:avLst/>
+          </a:prstGeom>
+        </p:spPr>
+      </p:pic>
+      <p:grpSp>
+        <p:nvGrpSpPr>
+          <p:cNvPr id="34" name="Group 33">
+            <a:extLst>
+              <a:ext uri="{FF2B5EF4-FFF2-40B4-BE49-F238E27FC236}">
+                <a16:creationId xmlns:a16="http://schemas.microsoft.com/office/drawing/2014/main" id="{5208C086-D92B-2BAD-72C7-2399D5D385E8}"/>
+              </a:ext>
+            </a:extLst>
+          </p:cNvPr>
+          <p:cNvGrpSpPr/>
+          <p:nvPr/>
+        </p:nvGrpSpPr>
+        <p:grpSpPr>
+          <a:xfrm>
+            <a:off x="4969614" y="1134275"/>
+            <a:ext cx="1047983" cy="1087000"/>
+            <a:chOff x="3780388" y="3240952"/>
+            <a:chExt cx="918387" cy="952579"/>
+          </a:xfrm>
+        </p:grpSpPr>
+        <p:sp>
+          <p:nvSpPr>
+            <p:cNvPr id="35" name="Circular Arrow 34">
+              <a:extLst>
+                <a:ext uri="{FF2B5EF4-FFF2-40B4-BE49-F238E27FC236}">
+                  <a16:creationId xmlns:a16="http://schemas.microsoft.com/office/drawing/2014/main" id="{0FB8A991-C769-8D4F-D390-643AFB8D06D8}"/>
+                </a:ext>
+              </a:extLst>
+            </p:cNvPr>
+            <p:cNvSpPr/>
+            <p:nvPr/>
+          </p:nvSpPr>
+          <p:spPr>
+            <a:xfrm>
+              <a:off x="3780388" y="3240952"/>
+              <a:ext cx="918387" cy="918387"/>
+            </a:xfrm>
+            <a:prstGeom prst="circularArrow">
+              <a:avLst>
+                <a:gd name="adj1" fmla="val 15221"/>
+                <a:gd name="adj2" fmla="val 1142319"/>
+                <a:gd name="adj3" fmla="val 20365396"/>
+                <a:gd name="adj4" fmla="val 10800000"/>
+                <a:gd name="adj5" fmla="val 14750"/>
+              </a:avLst>
+            </a:prstGeom>
+            <a:gradFill>
+              <a:gsLst>
+                <a:gs pos="25000">
+                  <a:srgbClr val="84BCFF"/>
+                </a:gs>
+                <a:gs pos="76000">
+                  <a:srgbClr val="3179FF"/>
+                </a:gs>
+                <a:gs pos="50000">
+                  <a:srgbClr val="68A1FF"/>
+                </a:gs>
+                <a:gs pos="0">
+                  <a:srgbClr val="C7E3FF"/>
+                </a:gs>
+                <a:gs pos="100000">
+                  <a:srgbClr val="1364D5"/>
+                </a:gs>
+              </a:gsLst>
+              <a:lin ang="0" scaled="0"/>
+            </a:gradFill>
+            <a:ln>
+              <a:noFill/>
+            </a:ln>
+          </p:spPr>
+          <p:style>
+            <a:lnRef idx="2">
+              <a:schemeClr val="accent1">
+                <a:shade val="15000"/>
+              </a:schemeClr>
+            </a:lnRef>
+            <a:fillRef idx="1">
+              <a:schemeClr val="accent1"/>
+            </a:fillRef>
+            <a:effectRef idx="0">
+              <a:schemeClr val="accent1"/>
+            </a:effectRef>
+            <a:fontRef idx="minor">
+              <a:schemeClr val="lt1"/>
+            </a:fontRef>
+          </p:style>
+          <p:txBody>
+            <a:bodyPr rtlCol="0" anchor="ctr"/>
+            <a:lstStyle/>
+            <a:p>
+              <a:pPr algn="ctr"/>
+              <a:endParaRPr lang="en-KR">
+                <a:solidFill>
+                  <a:schemeClr val="tx1"/>
+                </a:solidFill>
+              </a:endParaRPr>
+            </a:p>
+          </p:txBody>
+        </p:sp>
+        <p:sp>
+          <p:nvSpPr>
+            <p:cNvPr id="36" name="Circular Arrow 35">
+              <a:extLst>
+                <a:ext uri="{FF2B5EF4-FFF2-40B4-BE49-F238E27FC236}">
+                  <a16:creationId xmlns:a16="http://schemas.microsoft.com/office/drawing/2014/main" id="{7DC77E98-27B3-7A18-0BE1-A45DE2408E15}"/>
+                </a:ext>
+              </a:extLst>
+            </p:cNvPr>
+            <p:cNvSpPr/>
+            <p:nvPr/>
+          </p:nvSpPr>
+          <p:spPr>
+            <a:xfrm flipH="1" flipV="1">
+              <a:off x="3780388" y="3275144"/>
+              <a:ext cx="918387" cy="918387"/>
+            </a:xfrm>
+            <a:prstGeom prst="circularArrow">
+              <a:avLst>
+                <a:gd name="adj1" fmla="val 15221"/>
+                <a:gd name="adj2" fmla="val 1142319"/>
+                <a:gd name="adj3" fmla="val 20365396"/>
+                <a:gd name="adj4" fmla="val 10800000"/>
+                <a:gd name="adj5" fmla="val 14750"/>
+              </a:avLst>
+            </a:prstGeom>
+            <a:gradFill>
+              <a:gsLst>
+                <a:gs pos="25000">
+                  <a:srgbClr val="84BCFF"/>
+                </a:gs>
+                <a:gs pos="76000">
+                  <a:srgbClr val="3179FF"/>
+                </a:gs>
+                <a:gs pos="50000">
+                  <a:srgbClr val="68A1FF"/>
+                </a:gs>
+                <a:gs pos="0">
+                  <a:srgbClr val="C7E3FF"/>
+                </a:gs>
+                <a:gs pos="100000">
+                  <a:srgbClr val="1364D5"/>
+                </a:gs>
+              </a:gsLst>
+              <a:lin ang="10800000" scaled="0"/>
+            </a:gradFill>
+            <a:ln>
+              <a:noFill/>
+            </a:ln>
+          </p:spPr>
+          <p:style>
+            <a:lnRef idx="2">
+              <a:schemeClr val="accent1">
+                <a:shade val="15000"/>
+              </a:schemeClr>
+            </a:lnRef>
+            <a:fillRef idx="1">
+              <a:schemeClr val="accent1"/>
+            </a:fillRef>
+            <a:effectRef idx="0">
+              <a:schemeClr val="accent1"/>
+            </a:effectRef>
+            <a:fontRef idx="minor">
+              <a:schemeClr val="lt1"/>
+            </a:fontRef>
+          </p:style>
+          <p:txBody>
+            <a:bodyPr rtlCol="0" anchor="ctr"/>
+            <a:lstStyle/>
+            <a:p>
+              <a:pPr algn="ctr"/>
+              <a:endParaRPr lang="en-KR">
+                <a:solidFill>
+                  <a:schemeClr val="tx1"/>
+                </a:solidFill>
+              </a:endParaRPr>
+            </a:p>
+          </p:txBody>
+        </p:sp>
+      </p:grpSp>
+      <p:grpSp>
+        <p:nvGrpSpPr>
+          <p:cNvPr id="40" name="Group 39">
+            <a:extLst>
+              <a:ext uri="{FF2B5EF4-FFF2-40B4-BE49-F238E27FC236}">
+                <a16:creationId xmlns:a16="http://schemas.microsoft.com/office/drawing/2014/main" id="{37264923-55FC-03DF-92C7-7FA3A4EC68C6}"/>
+              </a:ext>
+            </a:extLst>
+          </p:cNvPr>
+          <p:cNvGrpSpPr/>
+          <p:nvPr/>
+        </p:nvGrpSpPr>
+        <p:grpSpPr>
+          <a:xfrm>
+            <a:off x="3480906" y="2643244"/>
+            <a:ext cx="4123028" cy="345173"/>
+            <a:chOff x="3477137" y="2716673"/>
+            <a:chExt cx="4123028" cy="345173"/>
+          </a:xfrm>
+        </p:grpSpPr>
+        <p:sp>
+          <p:nvSpPr>
+            <p:cNvPr id="37" name="Rounded Rectangle 36">
+              <a:extLst>
+                <a:ext uri="{FF2B5EF4-FFF2-40B4-BE49-F238E27FC236}">
+                  <a16:creationId xmlns:a16="http://schemas.microsoft.com/office/drawing/2014/main" id="{1D449EB8-7448-7E65-186A-65CF41927AAA}"/>
+                </a:ext>
+              </a:extLst>
+            </p:cNvPr>
+            <p:cNvSpPr/>
+            <p:nvPr/>
+          </p:nvSpPr>
+          <p:spPr>
+            <a:xfrm>
+              <a:off x="3544389" y="2716673"/>
+              <a:ext cx="3988525" cy="345173"/>
+            </a:xfrm>
+            <a:prstGeom prst="roundRect">
+              <a:avLst/>
+            </a:prstGeom>
+            <a:solidFill>
+              <a:schemeClr val="bg1">
+                <a:lumMod val="50000"/>
+              </a:schemeClr>
+            </a:solidFill>
+            <a:ln>
+              <a:noFill/>
+            </a:ln>
+            <a:effectLst>
+              <a:outerShdw blurRad="63500" sx="102000" sy="102000" algn="ctr" rotWithShape="0">
+                <a:prstClr val="black">
+                  <a:alpha val="19000"/>
+                </a:prstClr>
+              </a:outerShdw>
+            </a:effectLst>
+          </p:spPr>
+          <p:style>
+            <a:lnRef idx="2">
+              <a:schemeClr val="accent1">
+                <a:shade val="15000"/>
+              </a:schemeClr>
+            </a:lnRef>
+            <a:fillRef idx="1">
+              <a:schemeClr val="accent1"/>
+            </a:fillRef>
+            <a:effectRef idx="0">
+              <a:schemeClr val="accent1"/>
+            </a:effectRef>
+            <a:fontRef idx="minor">
+              <a:schemeClr val="lt1"/>
+            </a:fontRef>
+          </p:style>
+          <p:txBody>
+            <a:bodyPr rtlCol="0" anchor="ctr"/>
+            <a:lstStyle/>
+            <a:p>
+              <a:pPr algn="ctr"/>
+              <a:endParaRPr lang="en-KR"/>
+            </a:p>
+          </p:txBody>
+        </p:sp>
+        <p:sp>
+          <p:nvSpPr>
+            <p:cNvPr id="39" name="TextBox 38">
+              <a:extLst>
+                <a:ext uri="{FF2B5EF4-FFF2-40B4-BE49-F238E27FC236}">
+                  <a16:creationId xmlns:a16="http://schemas.microsoft.com/office/drawing/2014/main" id="{E98E21CA-62F8-CBDF-BD3B-4A27659BB394}"/>
+                </a:ext>
+              </a:extLst>
+            </p:cNvPr>
+            <p:cNvSpPr txBox="1"/>
+            <p:nvPr/>
+          </p:nvSpPr>
+          <p:spPr>
+            <a:xfrm>
+              <a:off x="3477137" y="2750368"/>
+              <a:ext cx="4123028" cy="292388"/>
+            </a:xfrm>
+            <a:prstGeom prst="rect">
+              <a:avLst/>
+            </a:prstGeom>
+            <a:noFill/>
+          </p:spPr>
+          <p:txBody>
+            <a:bodyPr wrap="square">
+              <a:spAutoFit/>
+            </a:bodyPr>
+            <a:lstStyle/>
+            <a:p>
+              <a:pPr algn="ctr"/>
+              <a:r>
+                <a:rPr lang="en-US" altLang="ko-KR" sz="1300" spc="-50" dirty="0">
+                  <a:solidFill>
+                    <a:schemeClr val="bg1"/>
+                  </a:solidFill>
+                  <a:latin typeface="Noto Sans KR" panose="020B0200000000000000" pitchFamily="34" charset="-128"/>
+                  <a:ea typeface="Noto Sans KR" panose="020B0200000000000000" pitchFamily="34" charset="-128"/>
+                </a:rPr>
+                <a:t>Vibration Reduction Mount Optimal Design Framework</a:t>
+              </a:r>
+            </a:p>
+          </p:txBody>
+        </p:sp>
+      </p:grpSp>
+      <p:pic>
+        <p:nvPicPr>
+          <p:cNvPr id="41" name="그림 233">
+            <a:extLst>
+              <a:ext uri="{FF2B5EF4-FFF2-40B4-BE49-F238E27FC236}">
+                <a16:creationId xmlns:a16="http://schemas.microsoft.com/office/drawing/2014/main" id="{E1575E36-643E-07FC-0DBB-A0DDD002EC12}"/>
+              </a:ext>
+            </a:extLst>
+          </p:cNvPr>
+          <p:cNvPicPr>
+            <a:picLocks noChangeAspect="1"/>
+          </p:cNvPicPr>
+          <p:nvPr/>
+        </p:nvPicPr>
+        <p:blipFill>
+          <a:blip r:embed="rId2"/>
+          <a:stretch>
+            <a:fillRect/>
+          </a:stretch>
+        </p:blipFill>
+        <p:spPr>
+          <a:xfrm>
+            <a:off x="3480906" y="3578427"/>
+            <a:ext cx="4150069" cy="2350731"/>
+          </a:xfrm>
+          <a:prstGeom prst="rect">
+            <a:avLst/>
+          </a:prstGeom>
+          <a:effectLst>
+            <a:outerShdw blurRad="63500" sx="102000" sy="102000" algn="ctr" rotWithShape="0">
+              <a:prstClr val="black">
+                <a:alpha val="0"/>
+              </a:prstClr>
+            </a:outerShdw>
+          </a:effectLst>
+        </p:spPr>
+      </p:pic>
+      <p:sp>
+        <p:nvSpPr>
+          <p:cNvPr id="48" name="사각형: 둥근 모서리 221">
+            <a:extLst>
+              <a:ext uri="{FF2B5EF4-FFF2-40B4-BE49-F238E27FC236}">
+                <a16:creationId xmlns:a16="http://schemas.microsoft.com/office/drawing/2014/main" id="{5E613F35-12A8-2D7C-38F3-63DB329E63EB}"/>
+              </a:ext>
+            </a:extLst>
+          </p:cNvPr>
+          <p:cNvSpPr/>
+          <p:nvPr/>
+        </p:nvSpPr>
+        <p:spPr>
+          <a:xfrm>
+            <a:off x="3671223" y="4049198"/>
+            <a:ext cx="1466414" cy="1257328"/>
+          </a:xfrm>
+          <a:prstGeom prst="roundRect">
+            <a:avLst>
+              <a:gd name="adj" fmla="val 4900"/>
+            </a:avLst>
+          </a:prstGeom>
+          <a:solidFill>
+            <a:schemeClr val="bg1"/>
+          </a:solidFill>
+          <a:ln>
+            <a:solidFill>
+              <a:schemeClr val="bg2">
+                <a:lumMod val="75000"/>
+              </a:schemeClr>
+            </a:solidFill>
+          </a:ln>
+          <a:effectLst>
+            <a:outerShdw blurRad="50800" dist="38100" dir="2700000" algn="tl" rotWithShape="0">
+              <a:prstClr val="black">
+                <a:alpha val="40000"/>
+              </a:prstClr>
+            </a:outerShdw>
+          </a:effectLst>
+        </p:spPr>
+        <p:style>
+          <a:lnRef idx="2">
+            <a:schemeClr val="accent1">
+              <a:shade val="50000"/>
+            </a:schemeClr>
+          </a:lnRef>
+          <a:fillRef idx="1">
+            <a:schemeClr val="accent1"/>
+          </a:fillRef>
+          <a:effectRef idx="0">
+            <a:schemeClr val="accent1"/>
+          </a:effectRef>
+          <a:fontRef idx="minor">
+            <a:schemeClr val="lt1"/>
+          </a:fontRef>
+        </p:style>
+        <p:txBody>
+          <a:bodyPr rtlCol="0" anchor="ctr"/>
+          <a:lstStyle/>
+          <a:p>
+            <a:pPr algn="ctr"/>
+            <a:endParaRPr lang="ko-KR" altLang="en-US" sz="1050" dirty="0"/>
+          </a:p>
+        </p:txBody>
+      </p:sp>
+      <p:sp>
+        <p:nvSpPr>
+          <p:cNvPr id="49" name="TextBox 48">
+            <a:extLst>
+              <a:ext uri="{FF2B5EF4-FFF2-40B4-BE49-F238E27FC236}">
+                <a16:creationId xmlns:a16="http://schemas.microsoft.com/office/drawing/2014/main" id="{43E543FE-9524-9B11-E173-87B12868E1AB}"/>
+              </a:ext>
+            </a:extLst>
+          </p:cNvPr>
+          <p:cNvSpPr txBox="1"/>
+          <p:nvPr/>
+        </p:nvSpPr>
+        <p:spPr>
+          <a:xfrm>
+            <a:off x="3676298" y="4092338"/>
+            <a:ext cx="1357973" cy="461665"/>
+          </a:xfrm>
+          <a:prstGeom prst="rect">
+            <a:avLst/>
+          </a:prstGeom>
+          <a:noFill/>
+        </p:spPr>
+        <p:txBody>
+          <a:bodyPr wrap="square" rtlCol="0">
+            <a:spAutoFit/>
+          </a:bodyPr>
+          <a:lstStyle/>
+          <a:p>
+            <a:pPr algn="ctr"/>
+            <a:r>
+              <a:rPr lang="en-US" altLang="ko-KR" sz="1200" spc="-50" dirty="0">
+                <a:solidFill>
+                  <a:schemeClr val="tx1"/>
+                </a:solidFill>
+                <a:latin typeface="Noto Sans KR" panose="020B0200000000000000" pitchFamily="34" charset="-128"/>
+                <a:ea typeface="Noto Sans KR" panose="020B0200000000000000" pitchFamily="34" charset="-128"/>
+              </a:rPr>
+              <a:t>Design variables</a:t>
+            </a:r>
+          </a:p>
+          <a:p>
+            <a:pPr algn="ctr"/>
+            <a:r>
+              <a:rPr lang="en-US" altLang="ko-KR" sz="1200" spc="-50" dirty="0">
+                <a:latin typeface="Noto Sans KR" panose="020B0200000000000000" pitchFamily="34" charset="-128"/>
+                <a:ea typeface="Noto Sans KR" panose="020B0200000000000000" pitchFamily="34" charset="-128"/>
+              </a:rPr>
+              <a:t>(w</a:t>
+            </a:r>
+            <a:r>
+              <a:rPr lang="en-US" altLang="ko-KR" sz="1200" spc="-50" baseline="-25000" dirty="0">
+                <a:latin typeface="Noto Sans KR" panose="020B0200000000000000" pitchFamily="34" charset="-128"/>
+                <a:ea typeface="Noto Sans KR" panose="020B0200000000000000" pitchFamily="34" charset="-128"/>
+              </a:rPr>
+              <a:t>1</a:t>
+            </a:r>
+            <a:r>
+              <a:rPr lang="en-US" altLang="ko-KR" sz="1200" spc="-50" dirty="0">
+                <a:latin typeface="Noto Sans KR" panose="020B0200000000000000" pitchFamily="34" charset="-128"/>
+                <a:ea typeface="Noto Sans KR" panose="020B0200000000000000" pitchFamily="34" charset="-128"/>
+              </a:rPr>
+              <a:t>, w</a:t>
+            </a:r>
+            <a:r>
+              <a:rPr lang="en-US" altLang="ko-KR" sz="1200" spc="-50" baseline="-25000" dirty="0">
+                <a:latin typeface="Noto Sans KR" panose="020B0200000000000000" pitchFamily="34" charset="-128"/>
+                <a:ea typeface="Noto Sans KR" panose="020B0200000000000000" pitchFamily="34" charset="-128"/>
+              </a:rPr>
+              <a:t>2</a:t>
+            </a:r>
+            <a:r>
+              <a:rPr lang="en-US" altLang="ko-KR" sz="1200" spc="-50" dirty="0">
+                <a:latin typeface="Noto Sans KR" panose="020B0200000000000000" pitchFamily="34" charset="-128"/>
+                <a:ea typeface="Noto Sans KR" panose="020B0200000000000000" pitchFamily="34" charset="-128"/>
+              </a:rPr>
+              <a:t>, d, a, b, t, h)</a:t>
+            </a:r>
+            <a:endParaRPr lang="en-US" altLang="ko-KR" sz="1200" spc="-50" dirty="0">
+              <a:solidFill>
+                <a:schemeClr val="tx1"/>
+              </a:solidFill>
+              <a:latin typeface="Noto Sans KR" panose="020B0200000000000000" pitchFamily="34" charset="-128"/>
+              <a:ea typeface="Noto Sans KR" panose="020B0200000000000000" pitchFamily="34" charset="-128"/>
+            </a:endParaRPr>
+          </a:p>
+        </p:txBody>
+      </p:sp>
+      <p:pic>
+        <p:nvPicPr>
+          <p:cNvPr id="50" name="그래픽 220" descr="머리 안의 뇌">
+            <a:extLst>
+              <a:ext uri="{FF2B5EF4-FFF2-40B4-BE49-F238E27FC236}">
+                <a16:creationId xmlns:a16="http://schemas.microsoft.com/office/drawing/2014/main" id="{B31AAB37-81C3-D6F2-5373-ED26FB69AF56}"/>
+              </a:ext>
+            </a:extLst>
+          </p:cNvPr>
+          <p:cNvPicPr>
+            <a:picLocks noChangeAspect="1"/>
+          </p:cNvPicPr>
+          <p:nvPr/>
+        </p:nvPicPr>
+        <p:blipFill>
+          <a:blip r:embed="rId3">
+            <a:extLst>
+              <a:ext uri="{28A0092B-C50C-407E-A947-70E740481C1C}">
+                <a14:useLocalDpi xmlns:a14="http://schemas.microsoft.com/office/drawing/2010/main" val="0"/>
+              </a:ext>
+              <a:ext uri="{96DAC541-7B7A-43D3-8B79-37D633B846F1}">
+                <asvg:svgBlip xmlns:asvg="http://schemas.microsoft.com/office/drawing/2016/SVG/main" r:embed="rId4"/>
+              </a:ext>
+            </a:extLst>
+          </a:blip>
+          <a:stretch>
+            <a:fillRect/>
+          </a:stretch>
+        </p:blipFill>
+        <p:spPr>
+          <a:xfrm>
+            <a:off x="4106570" y="4671293"/>
+            <a:ext cx="640667" cy="640667"/>
+          </a:xfrm>
+          <a:prstGeom prst="rect">
+            <a:avLst/>
+          </a:prstGeom>
+        </p:spPr>
+      </p:pic>
+      <p:pic>
+        <p:nvPicPr>
+          <p:cNvPr id="51" name="Picture 2" descr="COMSOL (@COMSOL_Inc) / Twitter">
+            <a:extLst>
+              <a:ext uri="{FF2B5EF4-FFF2-40B4-BE49-F238E27FC236}">
+                <a16:creationId xmlns:a16="http://schemas.microsoft.com/office/drawing/2014/main" id="{F6DC2F19-7A82-5391-633E-883D95D96CCB}"/>
+              </a:ext>
+            </a:extLst>
+          </p:cNvPr>
+          <p:cNvPicPr>
+            <a:picLocks noChangeAspect="1" noChangeArrowheads="1"/>
+          </p:cNvPicPr>
+          <p:nvPr/>
+        </p:nvPicPr>
+        <p:blipFill>
+          <a:blip r:embed="rId5" cstate="print">
+            <a:extLst>
+              <a:ext uri="{28A0092B-C50C-407E-A947-70E740481C1C}">
+                <a14:useLocalDpi xmlns:a14="http://schemas.microsoft.com/office/drawing/2010/main" val="0"/>
+              </a:ext>
+            </a:extLst>
+          </a:blip>
+          <a:srcRect/>
+          <a:stretch>
+            <a:fillRect/>
+          </a:stretch>
+        </p:blipFill>
+        <p:spPr bwMode="auto">
+          <a:xfrm>
+            <a:off x="5248612" y="3764747"/>
+            <a:ext cx="485555" cy="485555"/>
+          </a:xfrm>
+          <a:prstGeom prst="rect">
+            <a:avLst/>
+          </a:prstGeom>
+          <a:noFill/>
+          <a:ln>
+            <a:solidFill>
+              <a:schemeClr val="bg2">
+                <a:lumMod val="90000"/>
+              </a:schemeClr>
+            </a:solidFill>
+          </a:ln>
+          <a:effectLst>
+            <a:outerShdw blurRad="50800" dist="38100" dir="2700000" algn="tl" rotWithShape="0">
+              <a:prstClr val="black">
+                <a:alpha val="40000"/>
+              </a:prstClr>
+            </a:outerShdw>
+          </a:effectLst>
+          <a:extLst>
+            <a:ext uri="{909E8E84-426E-40DD-AFC4-6F175D3DCCD1}">
+              <a14:hiddenFill xmlns:a14="http://schemas.microsoft.com/office/drawing/2010/main">
+                <a:solidFill>
+                  <a:srgbClr val="FFFFFF"/>
+                </a:solidFill>
+              </a14:hiddenFill>
+            </a:ext>
+          </a:extLst>
+        </p:spPr>
+      </p:pic>
+      <p:pic>
+        <p:nvPicPr>
+          <p:cNvPr id="52" name="Picture 4" descr="Matlab Niveau 1 - Ackware - Centre de formation à Reims">
+            <a:extLst>
+              <a:ext uri="{FF2B5EF4-FFF2-40B4-BE49-F238E27FC236}">
+                <a16:creationId xmlns:a16="http://schemas.microsoft.com/office/drawing/2014/main" id="{DA858302-F80A-97D6-E1D5-F5FA4ADFC4E6}"/>
+              </a:ext>
+            </a:extLst>
+          </p:cNvPr>
+          <p:cNvPicPr>
+            <a:picLocks noChangeAspect="1" noChangeArrowheads="1"/>
+          </p:cNvPicPr>
+          <p:nvPr/>
+        </p:nvPicPr>
+        <p:blipFill rotWithShape="1">
+          <a:blip r:embed="rId6" cstate="print">
+            <a:extLst>
+              <a:ext uri="{28A0092B-C50C-407E-A947-70E740481C1C}">
+                <a14:useLocalDpi xmlns:a14="http://schemas.microsoft.com/office/drawing/2010/main" val="0"/>
+              </a:ext>
+            </a:extLst>
+          </a:blip>
+          <a:srcRect l="22494" t="5663" r="20840" b="5915"/>
+          <a:stretch/>
+        </p:blipFill>
+        <p:spPr bwMode="auto">
+          <a:xfrm>
+            <a:off x="5233696" y="5104946"/>
+            <a:ext cx="487440" cy="456356"/>
+          </a:xfrm>
+          <a:prstGeom prst="rect">
+            <a:avLst/>
+          </a:prstGeom>
+          <a:noFill/>
+          <a:ln>
+            <a:solidFill>
+              <a:schemeClr val="bg2">
+                <a:lumMod val="90000"/>
+              </a:schemeClr>
+            </a:solidFill>
+          </a:ln>
+          <a:effectLst>
+            <a:outerShdw blurRad="50800" dist="38100" dir="2700000" algn="tl" rotWithShape="0">
+              <a:prstClr val="black">
+                <a:alpha val="40000"/>
+              </a:prstClr>
+            </a:outerShdw>
+          </a:effectLst>
+          <a:extLst>
+            <a:ext uri="{909E8E84-426E-40DD-AFC4-6F175D3DCCD1}">
+              <a14:hiddenFill xmlns:a14="http://schemas.microsoft.com/office/drawing/2010/main">
+                <a:solidFill>
+                  <a:srgbClr val="FFFFFF"/>
+                </a:solidFill>
+              </a14:hiddenFill>
+            </a:ext>
+          </a:extLst>
+        </p:spPr>
+      </p:pic>
+      <p:pic>
+        <p:nvPicPr>
+          <p:cNvPr id="54" name="그림 266">
+            <a:extLst>
+              <a:ext uri="{FF2B5EF4-FFF2-40B4-BE49-F238E27FC236}">
+                <a16:creationId xmlns:a16="http://schemas.microsoft.com/office/drawing/2014/main" id="{600D58AA-B397-EA72-20E7-0172A606000E}"/>
+              </a:ext>
+            </a:extLst>
+          </p:cNvPr>
+          <p:cNvPicPr>
+            <a:picLocks noChangeAspect="1"/>
+          </p:cNvPicPr>
+          <p:nvPr/>
+        </p:nvPicPr>
+        <p:blipFill>
+          <a:blip r:embed="rId8"/>
+          <a:stretch>
+            <a:fillRect/>
+          </a:stretch>
+        </p:blipFill>
+        <p:spPr>
+          <a:xfrm>
+            <a:off x="3236857" y="4705065"/>
+            <a:ext cx="383254" cy="332111"/>
+          </a:xfrm>
+          <a:prstGeom prst="rect">
+            <a:avLst/>
+          </a:prstGeom>
+        </p:spPr>
+      </p:pic>
+      <p:grpSp>
+        <p:nvGrpSpPr>
+          <p:cNvPr id="58" name="Group 57">
+            <a:extLst>
+              <a:ext uri="{FF2B5EF4-FFF2-40B4-BE49-F238E27FC236}">
+                <a16:creationId xmlns:a16="http://schemas.microsoft.com/office/drawing/2014/main" id="{613A13C4-0582-2DAA-034F-AAA3C0CBBF0C}"/>
+              </a:ext>
+            </a:extLst>
+          </p:cNvPr>
+          <p:cNvGrpSpPr/>
+          <p:nvPr/>
+        </p:nvGrpSpPr>
+        <p:grpSpPr>
+          <a:xfrm>
+            <a:off x="3480906" y="5649202"/>
+            <a:ext cx="4123028" cy="345173"/>
+            <a:chOff x="3477137" y="2716673"/>
+            <a:chExt cx="4123028" cy="345173"/>
+          </a:xfrm>
+        </p:grpSpPr>
+        <p:sp>
+          <p:nvSpPr>
+            <p:cNvPr id="59" name="Rounded Rectangle 58">
+              <a:extLst>
+                <a:ext uri="{FF2B5EF4-FFF2-40B4-BE49-F238E27FC236}">
+                  <a16:creationId xmlns:a16="http://schemas.microsoft.com/office/drawing/2014/main" id="{96F698E1-3951-A638-D261-068336BCB14E}"/>
+                </a:ext>
+              </a:extLst>
+            </p:cNvPr>
+            <p:cNvSpPr/>
+            <p:nvPr/>
+          </p:nvSpPr>
+          <p:spPr>
+            <a:xfrm>
+              <a:off x="3544389" y="2716673"/>
+              <a:ext cx="3988525" cy="345173"/>
+            </a:xfrm>
+            <a:prstGeom prst="roundRect">
+              <a:avLst/>
+            </a:prstGeom>
+            <a:solidFill>
+              <a:schemeClr val="bg1">
+                <a:lumMod val="50000"/>
+              </a:schemeClr>
+            </a:solidFill>
+            <a:ln>
+              <a:noFill/>
+            </a:ln>
+            <a:effectLst>
+              <a:outerShdw blurRad="63500" sx="102000" sy="102000" algn="ctr" rotWithShape="0">
+                <a:prstClr val="black">
+                  <a:alpha val="19000"/>
+                </a:prstClr>
+              </a:outerShdw>
+            </a:effectLst>
+          </p:spPr>
+          <p:style>
+            <a:lnRef idx="2">
+              <a:schemeClr val="accent1">
+                <a:shade val="15000"/>
+              </a:schemeClr>
+            </a:lnRef>
+            <a:fillRef idx="1">
+              <a:schemeClr val="accent1"/>
+            </a:fillRef>
+            <a:effectRef idx="0">
+              <a:schemeClr val="accent1"/>
+            </a:effectRef>
+            <a:fontRef idx="minor">
+              <a:schemeClr val="lt1"/>
+            </a:fontRef>
+          </p:style>
+          <p:txBody>
+            <a:bodyPr rtlCol="0" anchor="ctr"/>
+            <a:lstStyle/>
+            <a:p>
+              <a:pPr algn="ctr"/>
+              <a:endParaRPr lang="en-KR"/>
+            </a:p>
+          </p:txBody>
+        </p:sp>
+        <p:sp>
+          <p:nvSpPr>
+            <p:cNvPr id="60" name="TextBox 59">
+              <a:extLst>
+                <a:ext uri="{FF2B5EF4-FFF2-40B4-BE49-F238E27FC236}">
+                  <a16:creationId xmlns:a16="http://schemas.microsoft.com/office/drawing/2014/main" id="{AC24435D-0742-CC96-E6EB-AFFB3EE46573}"/>
+                </a:ext>
+              </a:extLst>
+            </p:cNvPr>
+            <p:cNvSpPr txBox="1"/>
+            <p:nvPr/>
+          </p:nvSpPr>
+          <p:spPr>
+            <a:xfrm>
+              <a:off x="3477137" y="2750368"/>
+              <a:ext cx="4123028" cy="292388"/>
+            </a:xfrm>
+            <a:prstGeom prst="rect">
+              <a:avLst/>
+            </a:prstGeom>
+            <a:noFill/>
+          </p:spPr>
+          <p:txBody>
+            <a:bodyPr wrap="square">
+              <a:spAutoFit/>
+            </a:bodyPr>
+            <a:lstStyle/>
+            <a:p>
+              <a:pPr algn="ctr"/>
+              <a:r>
+                <a:rPr lang="en-US" altLang="ko-KR" sz="1300" spc="-50" dirty="0">
+                  <a:solidFill>
+                    <a:schemeClr val="bg1"/>
+                  </a:solidFill>
+                  <a:latin typeface="Noto Sans KR" panose="020B0200000000000000" pitchFamily="34" charset="-128"/>
+                  <a:ea typeface="Noto Sans KR" panose="020B0200000000000000" pitchFamily="34" charset="-128"/>
+                </a:rPr>
+                <a:t>Vibration Reduction Mount Optimal Design Framework</a:t>
+              </a:r>
+            </a:p>
+          </p:txBody>
+        </p:sp>
+      </p:grpSp>
+      <p:pic>
+        <p:nvPicPr>
+          <p:cNvPr id="61" name="Picture 60">
+            <a:extLst>
+              <a:ext uri="{FF2B5EF4-FFF2-40B4-BE49-F238E27FC236}">
+                <a16:creationId xmlns:a16="http://schemas.microsoft.com/office/drawing/2014/main" id="{298B84DE-2DF2-BF23-B6DB-51BBB53175C2}"/>
+              </a:ext>
+            </a:extLst>
+          </p:cNvPr>
+          <p:cNvPicPr>
+            <a:picLocks noChangeAspect="1"/>
+          </p:cNvPicPr>
+          <p:nvPr/>
+        </p:nvPicPr>
+        <p:blipFill>
+          <a:blip r:embed="rId10"/>
+          <a:stretch>
+            <a:fillRect/>
+          </a:stretch>
+        </p:blipFill>
+        <p:spPr>
+          <a:xfrm>
+            <a:off x="1341406" y="3793470"/>
+            <a:ext cx="1983286" cy="2216066"/>
+          </a:xfrm>
+          <a:prstGeom prst="rect">
+            <a:avLst/>
+          </a:prstGeom>
+        </p:spPr>
+      </p:pic>
+      <p:pic>
+        <p:nvPicPr>
+          <p:cNvPr id="63" name="Picture 62">
+            <a:extLst>
+              <a:ext uri="{FF2B5EF4-FFF2-40B4-BE49-F238E27FC236}">
+                <a16:creationId xmlns:a16="http://schemas.microsoft.com/office/drawing/2014/main" id="{5CE44E93-1DD7-6EB0-BB50-B43EA7933328}"/>
+              </a:ext>
+            </a:extLst>
+          </p:cNvPr>
+          <p:cNvPicPr>
+            <a:picLocks noChangeAspect="1"/>
+          </p:cNvPicPr>
+          <p:nvPr/>
+        </p:nvPicPr>
+        <p:blipFill>
+          <a:blip r:embed="rId11"/>
+          <a:srcRect r="55187" b="99"/>
+          <a:stretch/>
+        </p:blipFill>
+        <p:spPr>
+          <a:xfrm>
+            <a:off x="5810038" y="3718264"/>
+            <a:ext cx="1045248" cy="1340928"/>
+          </a:xfrm>
+          <a:prstGeom prst="rect">
+            <a:avLst/>
+          </a:prstGeom>
+        </p:spPr>
+      </p:pic>
+      <p:pic>
+        <p:nvPicPr>
+          <p:cNvPr id="64" name="Picture 63">
+            <a:extLst>
+              <a:ext uri="{FF2B5EF4-FFF2-40B4-BE49-F238E27FC236}">
+                <a16:creationId xmlns:a16="http://schemas.microsoft.com/office/drawing/2014/main" id="{194584AC-0AF4-B937-0A24-C8CD822FB2E4}"/>
+              </a:ext>
+            </a:extLst>
+          </p:cNvPr>
+          <p:cNvPicPr>
+            <a:picLocks noChangeAspect="1"/>
+          </p:cNvPicPr>
+          <p:nvPr/>
+        </p:nvPicPr>
+        <p:blipFill>
+          <a:blip r:embed="rId11"/>
+          <a:srcRect l="45693" t="2559" r="856"/>
+          <a:stretch/>
+        </p:blipFill>
+        <p:spPr>
+          <a:xfrm>
+            <a:off x="6190317" y="4269965"/>
+            <a:ext cx="1219002" cy="1278847"/>
+          </a:xfrm>
+          <a:prstGeom prst="rect">
+            <a:avLst/>
+          </a:prstGeom>
+          <a:solidFill>
+            <a:schemeClr val="bg1"/>
+          </a:solidFill>
+          <a:ln w="12700">
+            <a:solidFill>
+              <a:schemeClr val="bg2">
+                <a:lumMod val="75000"/>
+              </a:schemeClr>
+            </a:solidFill>
+          </a:ln>
+          <a:effectLst>
+            <a:outerShdw blurRad="50800" dist="38100" dir="2700000" algn="tl" rotWithShape="0">
+              <a:prstClr val="black">
+                <a:alpha val="40000"/>
+              </a:prstClr>
+            </a:outerShdw>
+          </a:effectLst>
+        </p:spPr>
+      </p:pic>
+      <p:grpSp>
+        <p:nvGrpSpPr>
+          <p:cNvPr id="55" name="Group 54">
+            <a:extLst>
+              <a:ext uri="{FF2B5EF4-FFF2-40B4-BE49-F238E27FC236}">
+                <a16:creationId xmlns:a16="http://schemas.microsoft.com/office/drawing/2014/main" id="{249CE85B-578D-AF81-D919-14A22CCB48F5}"/>
+              </a:ext>
+            </a:extLst>
+          </p:cNvPr>
+          <p:cNvGrpSpPr/>
+          <p:nvPr/>
+        </p:nvGrpSpPr>
+        <p:grpSpPr>
+          <a:xfrm>
+            <a:off x="4969614" y="4140233"/>
+            <a:ext cx="1047983" cy="1087000"/>
+            <a:chOff x="3780388" y="3240952"/>
+            <a:chExt cx="918387" cy="952579"/>
+          </a:xfrm>
+        </p:grpSpPr>
+        <p:sp>
+          <p:nvSpPr>
+            <p:cNvPr id="56" name="Circular Arrow 55">
+              <a:extLst>
+                <a:ext uri="{FF2B5EF4-FFF2-40B4-BE49-F238E27FC236}">
+                  <a16:creationId xmlns:a16="http://schemas.microsoft.com/office/drawing/2014/main" id="{9FED59C8-D416-D996-F0B6-382D0AFF4F2D}"/>
+                </a:ext>
+              </a:extLst>
+            </p:cNvPr>
+            <p:cNvSpPr/>
+            <p:nvPr/>
+          </p:nvSpPr>
+          <p:spPr>
+            <a:xfrm>
+              <a:off x="3780388" y="3240952"/>
+              <a:ext cx="918387" cy="918387"/>
+            </a:xfrm>
+            <a:prstGeom prst="circularArrow">
+              <a:avLst>
+                <a:gd name="adj1" fmla="val 15221"/>
+                <a:gd name="adj2" fmla="val 1142319"/>
+                <a:gd name="adj3" fmla="val 20365396"/>
+                <a:gd name="adj4" fmla="val 10800000"/>
+                <a:gd name="adj5" fmla="val 14750"/>
+              </a:avLst>
+            </a:prstGeom>
+            <a:gradFill>
+              <a:gsLst>
+                <a:gs pos="25000">
+                  <a:srgbClr val="84BCFF"/>
+                </a:gs>
+                <a:gs pos="76000">
+                  <a:srgbClr val="3179FF"/>
+                </a:gs>
+                <a:gs pos="50000">
+                  <a:srgbClr val="68A1FF"/>
+                </a:gs>
+                <a:gs pos="0">
+                  <a:srgbClr val="C7E3FF"/>
+                </a:gs>
+                <a:gs pos="100000">
+                  <a:srgbClr val="1364D5"/>
+                </a:gs>
+              </a:gsLst>
+              <a:lin ang="0" scaled="0"/>
+            </a:gradFill>
+            <a:ln>
+              <a:noFill/>
+            </a:ln>
+          </p:spPr>
+          <p:style>
+            <a:lnRef idx="2">
+              <a:schemeClr val="accent1">
+                <a:shade val="15000"/>
+              </a:schemeClr>
+            </a:lnRef>
+            <a:fillRef idx="1">
+              <a:schemeClr val="accent1"/>
+            </a:fillRef>
+            <a:effectRef idx="0">
+              <a:schemeClr val="accent1"/>
+            </a:effectRef>
+            <a:fontRef idx="minor">
+              <a:schemeClr val="lt1"/>
+            </a:fontRef>
+          </p:style>
+          <p:txBody>
+            <a:bodyPr rtlCol="0" anchor="ctr"/>
+            <a:lstStyle/>
+            <a:p>
+              <a:pPr algn="ctr"/>
+              <a:endParaRPr lang="en-KR">
+                <a:solidFill>
+                  <a:schemeClr val="tx1"/>
+                </a:solidFill>
+              </a:endParaRPr>
+            </a:p>
+          </p:txBody>
+        </p:sp>
+        <p:sp>
+          <p:nvSpPr>
+            <p:cNvPr id="57" name="Circular Arrow 56">
+              <a:extLst>
+                <a:ext uri="{FF2B5EF4-FFF2-40B4-BE49-F238E27FC236}">
+                  <a16:creationId xmlns:a16="http://schemas.microsoft.com/office/drawing/2014/main" id="{2D488302-2460-400A-2521-79A179985E43}"/>
+                </a:ext>
+              </a:extLst>
+            </p:cNvPr>
+            <p:cNvSpPr/>
+            <p:nvPr/>
+          </p:nvSpPr>
+          <p:spPr>
+            <a:xfrm flipH="1" flipV="1">
+              <a:off x="3780388" y="3275144"/>
+              <a:ext cx="918387" cy="918387"/>
+            </a:xfrm>
+            <a:prstGeom prst="circularArrow">
+              <a:avLst>
+                <a:gd name="adj1" fmla="val 15221"/>
+                <a:gd name="adj2" fmla="val 1142319"/>
+                <a:gd name="adj3" fmla="val 20365396"/>
+                <a:gd name="adj4" fmla="val 10800000"/>
+                <a:gd name="adj5" fmla="val 14750"/>
+              </a:avLst>
+            </a:prstGeom>
+            <a:gradFill>
+              <a:gsLst>
+                <a:gs pos="25000">
+                  <a:srgbClr val="84BCFF"/>
+                </a:gs>
+                <a:gs pos="76000">
+                  <a:srgbClr val="3179FF"/>
+                </a:gs>
+                <a:gs pos="50000">
+                  <a:srgbClr val="68A1FF"/>
+                </a:gs>
+                <a:gs pos="0">
+                  <a:srgbClr val="C7E3FF"/>
+                </a:gs>
+                <a:gs pos="100000">
+                  <a:srgbClr val="1364D5"/>
+                </a:gs>
+              </a:gsLst>
+              <a:lin ang="10800000" scaled="0"/>
+            </a:gradFill>
+            <a:ln>
+              <a:noFill/>
+            </a:ln>
+          </p:spPr>
+          <p:style>
+            <a:lnRef idx="2">
+              <a:schemeClr val="accent1">
+                <a:shade val="15000"/>
+              </a:schemeClr>
+            </a:lnRef>
+            <a:fillRef idx="1">
+              <a:schemeClr val="accent1"/>
+            </a:fillRef>
+            <a:effectRef idx="0">
+              <a:schemeClr val="accent1"/>
+            </a:effectRef>
+            <a:fontRef idx="minor">
+              <a:schemeClr val="lt1"/>
+            </a:fontRef>
+          </p:style>
+          <p:txBody>
+            <a:bodyPr rtlCol="0" anchor="ctr"/>
+            <a:lstStyle/>
+            <a:p>
+              <a:pPr algn="ctr"/>
+              <a:endParaRPr lang="en-KR">
+                <a:solidFill>
+                  <a:schemeClr val="tx1"/>
+                </a:solidFill>
+              </a:endParaRPr>
+            </a:p>
+          </p:txBody>
+        </p:sp>
+      </p:grpSp>
     </p:spTree>
     <p:extLst>
       <p:ext uri="{BB962C8B-B14F-4D97-AF65-F5344CB8AC3E}">
